--- a/docs/presentation_2026/urban_heat_transfer_presentation_content_revision.pptx
+++ b/docs/presentation_2026/urban_heat_transfer_presentation_content_revision.pptx
@@ -3482,7 +3482,7 @@
                 </a:solidFill>
                 <a:latin typeface="Arial"/>
               </a:rPr>
-              <a:t>Research question + validation design</a:t>
+              <a:t>Research Question + Validation Design</a:t>
             </a:r>
           </a:p>
         </p:txBody>
@@ -3612,7 +3612,7 @@
                 </a:solidFill>
                 <a:latin typeface="Arial"/>
               </a:rPr>
-              <a:t>Modeling section: logistic vs random forest</a:t>
+              <a:t>Modeling Section: Logistic vs Random Forest</a:t>
             </a:r>
           </a:p>
         </p:txBody>
@@ -3742,7 +3742,7 @@
                 </a:solidFill>
                 <a:latin typeface="Arial"/>
               </a:rPr>
-              <a:t>Results side by side</a:t>
+              <a:t>Results Side by Side</a:t>
             </a:r>
           </a:p>
         </p:txBody>
@@ -3872,7 +3872,7 @@
                 </a:solidFill>
                 <a:latin typeface="Arial"/>
               </a:rPr>
-              <a:t>City-level signal shifts across evaluation designs</a:t>
+              <a:t>City-Level Signal Shifts Across Evaluation Designs</a:t>
             </a:r>
           </a:p>
         </p:txBody>
@@ -4002,7 +4002,7 @@
                 </a:solidFill>
                 <a:latin typeface="Arial"/>
               </a:rPr>
-              <a:t>Held-out Denver map example</a:t>
+              <a:t>Held-Out Denver Map Example</a:t>
             </a:r>
           </a:p>
         </p:txBody>
